--- a/Kursova_Presentation.pptx
+++ b/Kursova_Presentation.pptx
@@ -5,20 +5,21 @@
     <p:sldMasterId id="2147483648" r:id="rId1"/>
   </p:sldMasterIdLst>
   <p:notesMasterIdLst>
-    <p:notesMasterId r:id="rId13"/>
+    <p:notesMasterId r:id="rId14"/>
   </p:notesMasterIdLst>
   <p:sldIdLst>
     <p:sldId id="256" r:id="rId2"/>
     <p:sldId id="257" r:id="rId3"/>
     <p:sldId id="258" r:id="rId4"/>
     <p:sldId id="259" r:id="rId5"/>
-    <p:sldId id="260" r:id="rId6"/>
-    <p:sldId id="261" r:id="rId7"/>
-    <p:sldId id="262" r:id="rId8"/>
-    <p:sldId id="263" r:id="rId9"/>
-    <p:sldId id="264" r:id="rId10"/>
-    <p:sldId id="265" r:id="rId11"/>
-    <p:sldId id="266" r:id="rId12"/>
+    <p:sldId id="268" r:id="rId6"/>
+    <p:sldId id="260" r:id="rId7"/>
+    <p:sldId id="261" r:id="rId8"/>
+    <p:sldId id="262" r:id="rId9"/>
+    <p:sldId id="263" r:id="rId10"/>
+    <p:sldId id="264" r:id="rId11"/>
+    <p:sldId id="265" r:id="rId12"/>
+    <p:sldId id="266" r:id="rId13"/>
   </p:sldIdLst>
   <p:sldSz cx="9144000" cy="5143500" type="screen16x9"/>
   <p:notesSz cx="5143500" cy="9144000"/>
@@ -499,6 +500,90 @@
 </p:notes>
 </file>
 
+<file path=ppt/notesSlides/notesSlide12.xml><?xml version="1.0" encoding="utf-8"?>
+<p:notes xmlns:a="http://schemas.openxmlformats.org/drawingml/2006/main" xmlns:r="http://schemas.openxmlformats.org/officeDocument/2006/relationships" xmlns:p="http://schemas.openxmlformats.org/presentationml/2006/main">
+  <p:cSld>
+    <p:spTree>
+      <p:nvGrpSpPr>
+        <p:cNvPr id="1" name=""/>
+        <p:cNvGrpSpPr/>
+        <p:nvPr/>
+      </p:nvGrpSpPr>
+      <p:grpSpPr>
+        <a:xfrm>
+          <a:off x="0" y="0"/>
+          <a:ext cx="0" cy="0"/>
+          <a:chOff x="0" y="0"/>
+          <a:chExt cx="0" cy="0"/>
+        </a:xfrm>
+      </p:grpSpPr>
+      <p:sp>
+        <p:nvSpPr>
+          <p:cNvPr id="2" name="Slide Image Placeholder 1"/>
+          <p:cNvSpPr>
+            <a:spLocks noGrp="1" noRot="1" noChangeAspect="1"/>
+          </p:cNvSpPr>
+          <p:nvPr>
+            <p:ph type="sldImg"/>
+          </p:nvPr>
+        </p:nvSpPr>
+        <p:spPr/>
+      </p:sp>
+      <p:sp>
+        <p:nvSpPr>
+          <p:cNvPr id="3" name="Notes Placeholder 2"/>
+          <p:cNvSpPr>
+            <a:spLocks noGrp="1"/>
+          </p:cNvSpPr>
+          <p:nvPr>
+            <p:ph type="body" idx="1"/>
+          </p:nvPr>
+        </p:nvSpPr>
+        <p:spPr/>
+        <p:txBody>
+          <a:bodyPr/>
+          <a:lstStyle/>
+          <a:p>
+            <a:endParaRPr lang="en-US" dirty="0"/>
+          </a:p>
+        </p:txBody>
+      </p:sp>
+      <p:sp>
+        <p:nvSpPr>
+          <p:cNvPr id="4" name="Slide Number Placeholder 3"/>
+          <p:cNvSpPr>
+            <a:spLocks noGrp="1"/>
+          </p:cNvSpPr>
+          <p:nvPr>
+            <p:ph type="sldNum" sz="quarter" idx="10"/>
+          </p:nvPr>
+        </p:nvSpPr>
+        <p:spPr/>
+        <p:txBody>
+          <a:bodyPr/>
+          <a:lstStyle/>
+          <a:p>
+            <a:fld id="{F7021451-1387-4CA6-816F-3879F97B5CBC}" type="slidenum">
+              <a:rPr lang="en-US"/>
+              <a:t>12</a:t>
+            </a:fld>
+            <a:endParaRPr lang="en-US"/>
+          </a:p>
+        </p:txBody>
+      </p:sp>
+    </p:spTree>
+    <p:extLst>
+      <p:ext uri="{BB962C8B-B14F-4D97-AF65-F5344CB8AC3E}">
+        <p14:creationId xmlns:p14="http://schemas.microsoft.com/office/powerpoint/2010/main" val="1024086991"/>
+      </p:ext>
+    </p:extLst>
+  </p:cSld>
+  <p:clrMapOvr>
+    <a:masterClrMapping/>
+  </p:clrMapOvr>
+</p:notes>
+</file>
+
 <file path=ppt/notesSlides/notesSlide2.xml><?xml version="1.0" encoding="utf-8"?>
 <p:notes xmlns:a="http://schemas.openxmlformats.org/drawingml/2006/main" xmlns:r="http://schemas.openxmlformats.org/officeDocument/2006/relationships" xmlns:p="http://schemas.openxmlformats.org/presentationml/2006/main">
   <p:cSld>
@@ -825,7 +910,7 @@
     </p:spTree>
     <p:extLst>
       <p:ext uri="{BB962C8B-B14F-4D97-AF65-F5344CB8AC3E}">
-        <p14:creationId xmlns:p14="http://schemas.microsoft.com/office/powerpoint/2010/main" val="1024086991"/>
+        <p14:creationId xmlns:p14="http://schemas.microsoft.com/office/powerpoint/2010/main" val="971265919"/>
       </p:ext>
     </p:extLst>
   </p:cSld>
@@ -1946,6 +2031,122 @@
 </file>
 
 <file path=ppt/slides/slide10.xml><?xml version="1.0" encoding="utf-8"?>
+<p:sld xmlns:a="http://schemas.openxmlformats.org/drawingml/2006/main" xmlns:r="http://schemas.openxmlformats.org/officeDocument/2006/relationships" xmlns:p="http://schemas.openxmlformats.org/presentationml/2006/main">
+  <p:cSld name="Slide 9">
+    <p:bg>
+      <p:bgPr>
+        <a:solidFill>
+          <a:srgbClr val="0D1B2A"/>
+        </a:solidFill>
+        <a:effectLst/>
+      </p:bgPr>
+    </p:bg>
+    <p:spTree>
+      <p:nvGrpSpPr>
+        <p:cNvPr id="1" name=""/>
+        <p:cNvGrpSpPr/>
+        <p:nvPr/>
+      </p:nvGrpSpPr>
+      <p:grpSpPr>
+        <a:xfrm>
+          <a:off x="0" y="0"/>
+          <a:ext cx="0" cy="0"/>
+          <a:chOff x="0" y="0"/>
+          <a:chExt cx="0" cy="0"/>
+        </a:xfrm>
+      </p:grpSpPr>
+      <p:sp>
+        <p:nvSpPr>
+          <p:cNvPr id="2" name="Shape 0"/>
+          <p:cNvSpPr/>
+          <p:nvPr/>
+        </p:nvSpPr>
+        <p:spPr>
+          <a:xfrm>
+            <a:off x="0" y="0"/>
+            <a:ext cx="9144000" cy="914400"/>
+          </a:xfrm>
+          <a:prstGeom prst="rect">
+            <a:avLst/>
+          </a:prstGeom>
+          <a:solidFill>
+            <a:srgbClr val="1B2A4A"/>
+          </a:solidFill>
+          <a:ln/>
+        </p:spPr>
+      </p:sp>
+      <p:sp>
+        <p:nvSpPr>
+          <p:cNvPr id="3" name="Text 1"/>
+          <p:cNvSpPr/>
+          <p:nvPr/>
+        </p:nvSpPr>
+        <p:spPr>
+          <a:xfrm>
+            <a:off x="365760" y="137160"/>
+            <a:ext cx="8229600" cy="640080"/>
+          </a:xfrm>
+          <a:prstGeom prst="rect">
+            <a:avLst/>
+          </a:prstGeom>
+          <a:noFill/>
+          <a:ln/>
+        </p:spPr>
+        <p:txBody>
+          <a:bodyPr wrap="square" lIns="0" tIns="0" rIns="0" bIns="0" rtlCol="0" anchor="ctr"/>
+          <a:lstStyle/>
+          <a:p>
+            <a:pPr marL="0" indent="0">
+              <a:buNone/>
+            </a:pPr>
+            <a:r>
+              <a:rPr lang="en-US" sz="2200" b="1" dirty="0">
+                <a:solidFill>
+                  <a:srgbClr val="FFFFFF"/>
+                </a:solidFill>
+                <a:latin typeface="Calibri" pitchFamily="34" charset="0"/>
+                <a:ea typeface="Calibri" pitchFamily="34" charset="-122"/>
+                <a:cs typeface="Calibri" pitchFamily="34" charset="-120"/>
+              </a:rPr>
+              <a:t>ГРАФІКИ ЗБІЖНОСТІ МЕТОДІВ</a:t>
+            </a:r>
+            <a:endParaRPr lang="en-US" sz="2200" dirty="0"/>
+          </a:p>
+        </p:txBody>
+      </p:sp>
+      <p:pic>
+        <p:nvPicPr>
+          <p:cNvPr id="4" name="Image 0" descr="preencoded.png"/>
+          <p:cNvPicPr>
+            <a:picLocks noChangeAspect="1"/>
+          </p:cNvPicPr>
+          <p:nvPr/>
+        </p:nvPicPr>
+        <p:blipFill>
+          <a:blip r:embed="rId3"/>
+          <a:stretch>
+            <a:fillRect/>
+          </a:stretch>
+        </p:blipFill>
+        <p:spPr>
+          <a:xfrm>
+            <a:off x="274320" y="960120"/>
+            <a:ext cx="8595360" cy="3977640"/>
+          </a:xfrm>
+          <a:prstGeom prst="rect">
+            <a:avLst/>
+          </a:prstGeom>
+        </p:spPr>
+      </p:pic>
+    </p:spTree>
+  </p:cSld>
+  <p:clrMapOvr>
+    <a:masterClrMapping/>
+  </p:clrMapOvr>
+</p:sld>
+</file>
+
+<file path=ppt/slides/slide11.xml><?xml version="1.0" encoding="utf-8"?>
 <p:sld xmlns:a="http://schemas.openxmlformats.org/drawingml/2006/main" xmlns:r="http://schemas.openxmlformats.org/officeDocument/2006/relationships" xmlns:p="http://schemas.openxmlformats.org/presentationml/2006/main">
   <p:cSld name="Slide 10">
     <p:bg>
@@ -4331,7 +4532,7 @@
 </p:sld>
 </file>
 
-<file path=ppt/slides/slide11.xml><?xml version="1.0" encoding="utf-8"?>
+<file path=ppt/slides/slide12.xml><?xml version="1.0" encoding="utf-8"?>
 <p:sld xmlns:a="http://schemas.openxmlformats.org/drawingml/2006/main" xmlns:r="http://schemas.openxmlformats.org/officeDocument/2006/relationships" xmlns:p="http://schemas.openxmlformats.org/presentationml/2006/main">
   <p:cSld name="Slide 11">
     <p:bg>
@@ -6510,6 +6711,1109 @@
 
 <file path=ppt/slides/slide5.xml><?xml version="1.0" encoding="utf-8"?>
 <p:sld xmlns:a="http://schemas.openxmlformats.org/drawingml/2006/main" xmlns:r="http://schemas.openxmlformats.org/officeDocument/2006/relationships" xmlns:p="http://schemas.openxmlformats.org/presentationml/2006/main">
+  <p:cSld>
+    <p:bg>
+      <p:bgPr>
+        <a:solidFill>
+          <a:srgbClr val="0D1B2A"/>
+        </a:solidFill>
+        <a:effectLst/>
+      </p:bgPr>
+    </p:bg>
+    <p:spTree>
+      <p:nvGrpSpPr>
+        <p:cNvPr id="1" name=""/>
+        <p:cNvGrpSpPr/>
+        <p:nvPr/>
+      </p:nvGrpSpPr>
+      <p:grpSpPr>
+        <a:xfrm>
+          <a:off x="0" y="0"/>
+          <a:ext cx="0" cy="0"/>
+          <a:chOff x="0" y="0"/>
+          <a:chExt cx="0" cy="0"/>
+        </a:xfrm>
+      </p:grpSpPr>
+      <p:sp>
+        <p:nvSpPr>
+          <p:cNvPr id="7" name="Shape 0">
+            <a:extLst>
+              <a:ext uri="{FF2B5EF4-FFF2-40B4-BE49-F238E27FC236}">
+                <a16:creationId xmlns:a16="http://schemas.microsoft.com/office/drawing/2014/main" id="{EE08A738-942E-46B8-8670-8E6029CDE32B}"/>
+              </a:ext>
+            </a:extLst>
+          </p:cNvPr>
+          <p:cNvSpPr/>
+          <p:nvPr/>
+        </p:nvSpPr>
+        <p:spPr>
+          <a:xfrm>
+            <a:off x="0" y="0"/>
+            <a:ext cx="9144000" cy="914400"/>
+          </a:xfrm>
+          <a:prstGeom prst="rect">
+            <a:avLst/>
+          </a:prstGeom>
+          <a:solidFill>
+            <a:srgbClr val="1B2A4A"/>
+          </a:solidFill>
+          <a:ln/>
+        </p:spPr>
+      </p:sp>
+      <p:sp>
+        <p:nvSpPr>
+          <p:cNvPr id="8" name="Text 1">
+            <a:extLst>
+              <a:ext uri="{FF2B5EF4-FFF2-40B4-BE49-F238E27FC236}">
+                <a16:creationId xmlns:a16="http://schemas.microsoft.com/office/drawing/2014/main" id="{EF4F3271-B962-4990-9605-364AA1C6D1EA}"/>
+              </a:ext>
+            </a:extLst>
+          </p:cNvPr>
+          <p:cNvSpPr/>
+          <p:nvPr/>
+        </p:nvSpPr>
+        <p:spPr>
+          <a:xfrm>
+            <a:off x="365760" y="137160"/>
+            <a:ext cx="8229600" cy="640080"/>
+          </a:xfrm>
+          <a:prstGeom prst="rect">
+            <a:avLst/>
+          </a:prstGeom>
+          <a:noFill/>
+          <a:ln/>
+        </p:spPr>
+        <p:txBody>
+          <a:bodyPr wrap="square" lIns="0" tIns="0" rIns="0" bIns="0" rtlCol="0" anchor="ctr"/>
+          <a:lstStyle/>
+          <a:p>
+            <a:pPr marL="0" indent="0">
+              <a:buNone/>
+            </a:pPr>
+            <a:r>
+              <a:rPr lang="en-US" sz="2200" b="1" dirty="0">
+                <a:solidFill>
+                  <a:srgbClr val="FFFFFF"/>
+                </a:solidFill>
+                <a:latin typeface="Calibri" pitchFamily="34" charset="0"/>
+                <a:ea typeface="Calibri" pitchFamily="34" charset="-122"/>
+                <a:cs typeface="Calibri" pitchFamily="34" charset="-120"/>
+              </a:rPr>
+              <a:t>ЯК МЕРЕЖА НАВЧАЄТЬСЯ?</a:t>
+            </a:r>
+            <a:endParaRPr lang="en-US" sz="2200" dirty="0"/>
+          </a:p>
+        </p:txBody>
+      </p:sp>
+      <p:sp>
+        <p:nvSpPr>
+          <p:cNvPr id="9" name="Shape 2">
+            <a:extLst>
+              <a:ext uri="{FF2B5EF4-FFF2-40B4-BE49-F238E27FC236}">
+                <a16:creationId xmlns:a16="http://schemas.microsoft.com/office/drawing/2014/main" id="{45634C8C-D812-4375-8980-42153244E8F6}"/>
+              </a:ext>
+            </a:extLst>
+          </p:cNvPr>
+          <p:cNvSpPr/>
+          <p:nvPr/>
+        </p:nvSpPr>
+        <p:spPr>
+          <a:xfrm>
+            <a:off x="274320" y="1005840"/>
+            <a:ext cx="2468880" cy="3474720"/>
+          </a:xfrm>
+          <a:prstGeom prst="rect">
+            <a:avLst/>
+          </a:prstGeom>
+          <a:solidFill>
+            <a:srgbClr val="1B2A4A"/>
+          </a:solidFill>
+          <a:ln w="12700">
+            <a:solidFill>
+              <a:srgbClr val="1E88E5"/>
+            </a:solidFill>
+            <a:prstDash val="solid"/>
+          </a:ln>
+        </p:spPr>
+      </p:sp>
+      <p:sp>
+        <p:nvSpPr>
+          <p:cNvPr id="10" name="Shape 3">
+            <a:extLst>
+              <a:ext uri="{FF2B5EF4-FFF2-40B4-BE49-F238E27FC236}">
+                <a16:creationId xmlns:a16="http://schemas.microsoft.com/office/drawing/2014/main" id="{91773A55-9FEE-4281-A946-1002BEDDECB6}"/>
+              </a:ext>
+            </a:extLst>
+          </p:cNvPr>
+          <p:cNvSpPr/>
+          <p:nvPr/>
+        </p:nvSpPr>
+        <p:spPr>
+          <a:xfrm>
+            <a:off x="1234440" y="960120"/>
+            <a:ext cx="548640" cy="548640"/>
+          </a:xfrm>
+          <a:prstGeom prst="ellipse">
+            <a:avLst/>
+          </a:prstGeom>
+          <a:solidFill>
+            <a:srgbClr val="1E88E5"/>
+          </a:solidFill>
+          <a:ln/>
+        </p:spPr>
+      </p:sp>
+      <p:sp>
+        <p:nvSpPr>
+          <p:cNvPr id="11" name="Text 4">
+            <a:extLst>
+              <a:ext uri="{FF2B5EF4-FFF2-40B4-BE49-F238E27FC236}">
+                <a16:creationId xmlns:a16="http://schemas.microsoft.com/office/drawing/2014/main" id="{D5402F24-2D29-408D-8524-B307FFF31467}"/>
+              </a:ext>
+            </a:extLst>
+          </p:cNvPr>
+          <p:cNvSpPr/>
+          <p:nvPr/>
+        </p:nvSpPr>
+        <p:spPr>
+          <a:xfrm>
+            <a:off x="1234440" y="960120"/>
+            <a:ext cx="548640" cy="548640"/>
+          </a:xfrm>
+          <a:prstGeom prst="rect">
+            <a:avLst/>
+          </a:prstGeom>
+          <a:noFill/>
+          <a:ln/>
+        </p:spPr>
+        <p:txBody>
+          <a:bodyPr wrap="square" lIns="0" tIns="0" rIns="0" bIns="0" rtlCol="0" anchor="ctr"/>
+          <a:lstStyle/>
+          <a:p>
+            <a:pPr marL="0" indent="0" algn="ctr">
+              <a:buNone/>
+            </a:pPr>
+            <a:r>
+              <a:rPr lang="en-US" sz="1600" b="1" dirty="0">
+                <a:solidFill>
+                  <a:srgbClr val="FFFFFF"/>
+                </a:solidFill>
+                <a:latin typeface="Calibri" pitchFamily="34" charset="0"/>
+                <a:ea typeface="Calibri" pitchFamily="34" charset="-122"/>
+                <a:cs typeface="Calibri" pitchFamily="34" charset="-120"/>
+              </a:rPr>
+              <a:t>1</a:t>
+            </a:r>
+            <a:endParaRPr lang="en-US" sz="1600" dirty="0"/>
+          </a:p>
+        </p:txBody>
+      </p:sp>
+      <p:sp>
+        <p:nvSpPr>
+          <p:cNvPr id="12" name="Text 5">
+            <a:extLst>
+              <a:ext uri="{FF2B5EF4-FFF2-40B4-BE49-F238E27FC236}">
+                <a16:creationId xmlns:a16="http://schemas.microsoft.com/office/drawing/2014/main" id="{E225D4F3-CCA5-4500-8796-0CE22EE19BA7}"/>
+              </a:ext>
+            </a:extLst>
+          </p:cNvPr>
+          <p:cNvSpPr/>
+          <p:nvPr/>
+        </p:nvSpPr>
+        <p:spPr>
+          <a:xfrm>
+            <a:off x="365760" y="1508760"/>
+            <a:ext cx="2286000" cy="411480"/>
+          </a:xfrm>
+          <a:prstGeom prst="rect">
+            <a:avLst/>
+          </a:prstGeom>
+          <a:noFill/>
+          <a:ln/>
+        </p:spPr>
+        <p:txBody>
+          <a:bodyPr wrap="square" lIns="0" tIns="0" rIns="0" bIns="0" rtlCol="0" anchor="ctr"/>
+          <a:lstStyle/>
+          <a:p>
+            <a:pPr marL="0" indent="0" algn="ctr">
+              <a:buNone/>
+            </a:pPr>
+            <a:r>
+              <a:rPr lang="en-US" sz="1300" b="1" dirty="0">
+                <a:solidFill>
+                  <a:srgbClr val="1E88E5"/>
+                </a:solidFill>
+                <a:latin typeface="Calibri" pitchFamily="34" charset="0"/>
+                <a:ea typeface="Calibri" pitchFamily="34" charset="-122"/>
+                <a:cs typeface="Calibri" pitchFamily="34" charset="-120"/>
+              </a:rPr>
+              <a:t>Передбачення</a:t>
+            </a:r>
+            <a:endParaRPr lang="en-US" sz="1300" dirty="0"/>
+          </a:p>
+        </p:txBody>
+      </p:sp>
+      <p:sp>
+        <p:nvSpPr>
+          <p:cNvPr id="13" name="Text 6">
+            <a:extLst>
+              <a:ext uri="{FF2B5EF4-FFF2-40B4-BE49-F238E27FC236}">
+                <a16:creationId xmlns:a16="http://schemas.microsoft.com/office/drawing/2014/main" id="{114CA806-9330-4F81-A349-6026ED6B0A1B}"/>
+              </a:ext>
+            </a:extLst>
+          </p:cNvPr>
+          <p:cNvSpPr/>
+          <p:nvPr/>
+        </p:nvSpPr>
+        <p:spPr>
+          <a:xfrm>
+            <a:off x="365760" y="1965960"/>
+            <a:ext cx="2286000" cy="2194560"/>
+          </a:xfrm>
+          <a:prstGeom prst="rect">
+            <a:avLst/>
+          </a:prstGeom>
+          <a:noFill/>
+          <a:ln/>
+        </p:spPr>
+        <p:txBody>
+          <a:bodyPr wrap="square" lIns="0" tIns="0" rIns="0" bIns="0" rtlCol="0" anchor="ctr"/>
+          <a:lstStyle/>
+          <a:p>
+            <a:pPr marL="0" indent="0" algn="ctr">
+              <a:lnSpc>
+                <a:spcPct val="140000"/>
+              </a:lnSpc>
+              <a:buNone/>
+            </a:pPr>
+            <a:r>
+              <a:rPr lang="en-US" sz="1150" dirty="0">
+                <a:solidFill>
+                  <a:srgbClr val="E3F2FD"/>
+                </a:solidFill>
+                <a:latin typeface="Calibri" pitchFamily="34" charset="0"/>
+                <a:ea typeface="Calibri" pitchFamily="34" charset="-122"/>
+                <a:cs typeface="Calibri" pitchFamily="34" charset="-120"/>
+              </a:rPr>
+              <a:t>Мережа бачить</a:t>
+            </a:r>
+            <a:endParaRPr lang="en-US" sz="1150" dirty="0"/>
+          </a:p>
+          <a:p>
+            <a:pPr marL="0" indent="0" algn="ctr">
+              <a:lnSpc>
+                <a:spcPct val="140000"/>
+              </a:lnSpc>
+              <a:buNone/>
+            </a:pPr>
+            <a:r>
+              <a:rPr lang="en-US" sz="1150" dirty="0">
+                <a:solidFill>
+                  <a:srgbClr val="E3F2FD"/>
+                </a:solidFill>
+                <a:latin typeface="Calibri" pitchFamily="34" charset="0"/>
+                <a:ea typeface="Calibri" pitchFamily="34" charset="-122"/>
+                <a:cs typeface="Calibri" pitchFamily="34" charset="-120"/>
+              </a:rPr>
+              <a:t>вхідний вектор</a:t>
+            </a:r>
+            <a:endParaRPr lang="en-US" sz="1150" dirty="0"/>
+          </a:p>
+          <a:p>
+            <a:pPr marL="0" indent="0" algn="ctr">
+              <a:lnSpc>
+                <a:spcPct val="140000"/>
+              </a:lnSpc>
+              <a:buNone/>
+            </a:pPr>
+            <a:r>
+              <a:rPr lang="en-US" sz="1150" dirty="0">
+                <a:solidFill>
+                  <a:srgbClr val="E3F2FD"/>
+                </a:solidFill>
+                <a:latin typeface="Calibri" pitchFamily="34" charset="0"/>
+                <a:ea typeface="Calibri" pitchFamily="34" charset="-122"/>
+                <a:cs typeface="Calibri" pitchFamily="34" charset="-120"/>
+              </a:rPr>
+              <a:t>і рахує ŷ через</a:t>
+            </a:r>
+            <a:endParaRPr lang="en-US" sz="1150" dirty="0"/>
+          </a:p>
+          <a:p>
+            <a:pPr marL="0" indent="0" algn="ctr">
+              <a:lnSpc>
+                <a:spcPct val="140000"/>
+              </a:lnSpc>
+              <a:buNone/>
+            </a:pPr>
+            <a:r>
+              <a:rPr lang="en-US" sz="1150" dirty="0">
+                <a:solidFill>
+                  <a:srgbClr val="E3F2FD"/>
+                </a:solidFill>
+                <a:latin typeface="Calibri" pitchFamily="34" charset="0"/>
+                <a:ea typeface="Calibri" pitchFamily="34" charset="-122"/>
+                <a:cs typeface="Calibri" pitchFamily="34" charset="-120"/>
+              </a:rPr>
+              <a:t>сигмоїдні нейрони</a:t>
+            </a:r>
+            <a:endParaRPr lang="en-US" sz="1150" dirty="0"/>
+          </a:p>
+          <a:p>
+            <a:pPr marL="0" indent="0" algn="ctr">
+              <a:lnSpc>
+                <a:spcPct val="140000"/>
+              </a:lnSpc>
+              <a:buNone/>
+            </a:pPr>
+            <a:r>
+              <a:rPr lang="en-US" sz="1150" dirty="0">
+                <a:solidFill>
+                  <a:srgbClr val="E3F2FD"/>
+                </a:solidFill>
+                <a:latin typeface="Calibri" pitchFamily="34" charset="0"/>
+                <a:ea typeface="Calibri" pitchFamily="34" charset="-122"/>
+                <a:cs typeface="Calibri" pitchFamily="34" charset="-120"/>
+              </a:rPr>
+              <a:t>шар за шаром</a:t>
+            </a:r>
+            <a:endParaRPr lang="en-US" sz="1150" dirty="0"/>
+          </a:p>
+        </p:txBody>
+      </p:sp>
+      <p:sp>
+        <p:nvSpPr>
+          <p:cNvPr id="14" name="Text 8">
+            <a:extLst>
+              <a:ext uri="{FF2B5EF4-FFF2-40B4-BE49-F238E27FC236}">
+                <a16:creationId xmlns:a16="http://schemas.microsoft.com/office/drawing/2014/main" id="{781C770C-B7F4-4E4E-AF7B-752353594D25}"/>
+              </a:ext>
+            </a:extLst>
+          </p:cNvPr>
+          <p:cNvSpPr/>
+          <p:nvPr/>
+        </p:nvSpPr>
+        <p:spPr>
+          <a:xfrm>
+            <a:off x="2743200" y="2423160"/>
+            <a:ext cx="640080" cy="411480"/>
+          </a:xfrm>
+          <a:prstGeom prst="rect">
+            <a:avLst/>
+          </a:prstGeom>
+          <a:noFill/>
+          <a:ln/>
+        </p:spPr>
+        <p:txBody>
+          <a:bodyPr wrap="square" lIns="0" tIns="0" rIns="0" bIns="0" rtlCol="0" anchor="ctr"/>
+          <a:lstStyle/>
+          <a:p>
+            <a:pPr marL="0" indent="0" algn="ctr">
+              <a:buNone/>
+            </a:pPr>
+            <a:r>
+              <a:rPr lang="en-US" sz="2000" dirty="0">
+                <a:solidFill>
+                  <a:srgbClr val="B0BEC5"/>
+                </a:solidFill>
+              </a:rPr>
+              <a:t>→</a:t>
+            </a:r>
+            <a:endParaRPr lang="en-US" sz="2000" dirty="0"/>
+          </a:p>
+        </p:txBody>
+      </p:sp>
+      <p:sp>
+        <p:nvSpPr>
+          <p:cNvPr id="15" name="Shape 9">
+            <a:extLst>
+              <a:ext uri="{FF2B5EF4-FFF2-40B4-BE49-F238E27FC236}">
+                <a16:creationId xmlns:a16="http://schemas.microsoft.com/office/drawing/2014/main" id="{FC517379-DF37-48B7-9E9F-9D136AECDE50}"/>
+              </a:ext>
+            </a:extLst>
+          </p:cNvPr>
+          <p:cNvSpPr/>
+          <p:nvPr/>
+        </p:nvSpPr>
+        <p:spPr>
+          <a:xfrm>
+            <a:off x="3337560" y="1005840"/>
+            <a:ext cx="2468880" cy="3474720"/>
+          </a:xfrm>
+          <a:prstGeom prst="rect">
+            <a:avLst/>
+          </a:prstGeom>
+          <a:solidFill>
+            <a:srgbClr val="1B2A4A"/>
+          </a:solidFill>
+          <a:ln w="12700">
+            <a:solidFill>
+              <a:srgbClr val="F9A825"/>
+            </a:solidFill>
+            <a:prstDash val="solid"/>
+          </a:ln>
+        </p:spPr>
+      </p:sp>
+      <p:sp>
+        <p:nvSpPr>
+          <p:cNvPr id="16" name="Shape 10">
+            <a:extLst>
+              <a:ext uri="{FF2B5EF4-FFF2-40B4-BE49-F238E27FC236}">
+                <a16:creationId xmlns:a16="http://schemas.microsoft.com/office/drawing/2014/main" id="{362A1B2D-A7B2-437F-BD7C-5845446FBCBE}"/>
+              </a:ext>
+            </a:extLst>
+          </p:cNvPr>
+          <p:cNvSpPr/>
+          <p:nvPr/>
+        </p:nvSpPr>
+        <p:spPr>
+          <a:xfrm>
+            <a:off x="4297680" y="960120"/>
+            <a:ext cx="548640" cy="548640"/>
+          </a:xfrm>
+          <a:prstGeom prst="ellipse">
+            <a:avLst/>
+          </a:prstGeom>
+          <a:solidFill>
+            <a:srgbClr val="F9A825"/>
+          </a:solidFill>
+          <a:ln/>
+        </p:spPr>
+      </p:sp>
+      <p:sp>
+        <p:nvSpPr>
+          <p:cNvPr id="17" name="Text 11">
+            <a:extLst>
+              <a:ext uri="{FF2B5EF4-FFF2-40B4-BE49-F238E27FC236}">
+                <a16:creationId xmlns:a16="http://schemas.microsoft.com/office/drawing/2014/main" id="{7A234741-C06B-4572-BDA6-DC5BAF2100AC}"/>
+              </a:ext>
+            </a:extLst>
+          </p:cNvPr>
+          <p:cNvSpPr/>
+          <p:nvPr/>
+        </p:nvSpPr>
+        <p:spPr>
+          <a:xfrm>
+            <a:off x="4297680" y="960120"/>
+            <a:ext cx="548640" cy="548640"/>
+          </a:xfrm>
+          <a:prstGeom prst="rect">
+            <a:avLst/>
+          </a:prstGeom>
+          <a:noFill/>
+          <a:ln/>
+        </p:spPr>
+        <p:txBody>
+          <a:bodyPr wrap="square" lIns="0" tIns="0" rIns="0" bIns="0" rtlCol="0" anchor="ctr"/>
+          <a:lstStyle/>
+          <a:p>
+            <a:pPr marL="0" indent="0" algn="ctr">
+              <a:buNone/>
+            </a:pPr>
+            <a:r>
+              <a:rPr lang="en-US" sz="1600" b="1" dirty="0">
+                <a:solidFill>
+                  <a:srgbClr val="0D1B2A"/>
+                </a:solidFill>
+                <a:latin typeface="Calibri" pitchFamily="34" charset="0"/>
+                <a:ea typeface="Calibri" pitchFamily="34" charset="-122"/>
+                <a:cs typeface="Calibri" pitchFamily="34" charset="-120"/>
+              </a:rPr>
+              <a:t>2</a:t>
+            </a:r>
+            <a:endParaRPr lang="en-US" sz="1600" dirty="0"/>
+          </a:p>
+        </p:txBody>
+      </p:sp>
+      <p:sp>
+        <p:nvSpPr>
+          <p:cNvPr id="18" name="Text 12">
+            <a:extLst>
+              <a:ext uri="{FF2B5EF4-FFF2-40B4-BE49-F238E27FC236}">
+                <a16:creationId xmlns:a16="http://schemas.microsoft.com/office/drawing/2014/main" id="{74CCD000-F254-4BED-B7F1-7FD6FD87D1FF}"/>
+              </a:ext>
+            </a:extLst>
+          </p:cNvPr>
+          <p:cNvSpPr/>
+          <p:nvPr/>
+        </p:nvSpPr>
+        <p:spPr>
+          <a:xfrm>
+            <a:off x="3429000" y="1508760"/>
+            <a:ext cx="2286000" cy="411480"/>
+          </a:xfrm>
+          <a:prstGeom prst="rect">
+            <a:avLst/>
+          </a:prstGeom>
+          <a:noFill/>
+          <a:ln/>
+        </p:spPr>
+        <p:txBody>
+          <a:bodyPr wrap="square" lIns="0" tIns="0" rIns="0" bIns="0" rtlCol="0" anchor="ctr"/>
+          <a:lstStyle/>
+          <a:p>
+            <a:pPr marL="0" indent="0" algn="ctr">
+              <a:buNone/>
+            </a:pPr>
+            <a:r>
+              <a:rPr lang="en-US" sz="1300" b="1" dirty="0">
+                <a:solidFill>
+                  <a:srgbClr val="F9A825"/>
+                </a:solidFill>
+                <a:latin typeface="Calibri" pitchFamily="34" charset="0"/>
+                <a:ea typeface="Calibri" pitchFamily="34" charset="-122"/>
+                <a:cs typeface="Calibri" pitchFamily="34" charset="-120"/>
+              </a:rPr>
+              <a:t>Вимірювання помилки</a:t>
+            </a:r>
+            <a:endParaRPr lang="en-US" sz="1300" dirty="0"/>
+          </a:p>
+        </p:txBody>
+      </p:sp>
+      <p:sp>
+        <p:nvSpPr>
+          <p:cNvPr id="19" name="Text 13">
+            <a:extLst>
+              <a:ext uri="{FF2B5EF4-FFF2-40B4-BE49-F238E27FC236}">
+                <a16:creationId xmlns:a16="http://schemas.microsoft.com/office/drawing/2014/main" id="{7D8E0889-D9E3-4E62-A515-615C0AAC554E}"/>
+              </a:ext>
+            </a:extLst>
+          </p:cNvPr>
+          <p:cNvSpPr/>
+          <p:nvPr/>
+        </p:nvSpPr>
+        <p:spPr>
+          <a:xfrm>
+            <a:off x="3429000" y="1965960"/>
+            <a:ext cx="2286000" cy="2377440"/>
+          </a:xfrm>
+          <a:prstGeom prst="rect">
+            <a:avLst/>
+          </a:prstGeom>
+          <a:noFill/>
+          <a:ln/>
+        </p:spPr>
+        <p:txBody>
+          <a:bodyPr wrap="square" lIns="0" tIns="0" rIns="0" bIns="0" rtlCol="0" anchor="ctr"/>
+          <a:lstStyle/>
+          <a:p>
+            <a:pPr marL="0" indent="0" algn="ctr">
+              <a:lnSpc>
+                <a:spcPct val="135000"/>
+              </a:lnSpc>
+              <a:buNone/>
+            </a:pPr>
+            <a:r>
+              <a:rPr lang="en-US" sz="1150" dirty="0">
+                <a:solidFill>
+                  <a:srgbClr val="E3F2FD"/>
+                </a:solidFill>
+                <a:latin typeface="Calibri" pitchFamily="34" charset="0"/>
+                <a:ea typeface="Calibri" pitchFamily="34" charset="-122"/>
+                <a:cs typeface="Calibri" pitchFamily="34" charset="-120"/>
+              </a:rPr>
+              <a:t>MSE рахує наскільки</a:t>
+            </a:r>
+            <a:endParaRPr lang="en-US" sz="1150" dirty="0"/>
+          </a:p>
+          <a:p>
+            <a:pPr marL="0" indent="0" algn="ctr">
+              <a:lnSpc>
+                <a:spcPct val="135000"/>
+              </a:lnSpc>
+              <a:buNone/>
+            </a:pPr>
+            <a:r>
+              <a:rPr lang="en-US" sz="1150" dirty="0">
+                <a:solidFill>
+                  <a:srgbClr val="E3F2FD"/>
+                </a:solidFill>
+                <a:latin typeface="Calibri" pitchFamily="34" charset="0"/>
+                <a:ea typeface="Calibri" pitchFamily="34" charset="-122"/>
+                <a:cs typeface="Calibri" pitchFamily="34" charset="-120"/>
+              </a:rPr>
+              <a:t>передбачення ŷ</a:t>
+            </a:r>
+            <a:endParaRPr lang="en-US" sz="1150" dirty="0"/>
+          </a:p>
+          <a:p>
+            <a:pPr marL="0" indent="0" algn="ctr">
+              <a:lnSpc>
+                <a:spcPct val="135000"/>
+              </a:lnSpc>
+              <a:buNone/>
+            </a:pPr>
+            <a:r>
+              <a:rPr lang="en-US" sz="1150" dirty="0">
+                <a:solidFill>
+                  <a:srgbClr val="E3F2FD"/>
+                </a:solidFill>
+                <a:latin typeface="Calibri" pitchFamily="34" charset="0"/>
+                <a:ea typeface="Calibri" pitchFamily="34" charset="-122"/>
+                <a:cs typeface="Calibri" pitchFamily="34" charset="-120"/>
+              </a:rPr>
+              <a:t>відрізняється від</a:t>
+            </a:r>
+            <a:endParaRPr lang="en-US" sz="1150" dirty="0"/>
+          </a:p>
+          <a:p>
+            <a:pPr marL="0" indent="0" algn="ctr">
+              <a:lnSpc>
+                <a:spcPct val="135000"/>
+              </a:lnSpc>
+              <a:buNone/>
+            </a:pPr>
+            <a:r>
+              <a:rPr lang="en-US" sz="1150" dirty="0">
+                <a:solidFill>
+                  <a:srgbClr val="E3F2FD"/>
+                </a:solidFill>
+                <a:latin typeface="Calibri" pitchFamily="34" charset="0"/>
+                <a:ea typeface="Calibri" pitchFamily="34" charset="-122"/>
+                <a:cs typeface="Calibri" pitchFamily="34" charset="-120"/>
+              </a:rPr>
+              <a:t>правильної відповіді y.</a:t>
+            </a:r>
+            <a:endParaRPr lang="en-US" sz="1150" dirty="0"/>
+          </a:p>
+          <a:p>
+            <a:pPr marL="0" indent="0" algn="ctr">
+              <a:lnSpc>
+                <a:spcPct val="135000"/>
+              </a:lnSpc>
+              <a:buNone/>
+            </a:pPr>
+            <a:r>
+              <a:rPr lang="en-US" sz="1150" dirty="0">
+                <a:solidFill>
+                  <a:srgbClr val="E3F2FD"/>
+                </a:solidFill>
+                <a:latin typeface="Calibri" pitchFamily="34" charset="0"/>
+                <a:ea typeface="Calibri" pitchFamily="34" charset="-122"/>
+                <a:cs typeface="Calibri" pitchFamily="34" charset="-120"/>
+              </a:rPr>
+              <a:t>Чим більше — тим</a:t>
+            </a:r>
+            <a:endParaRPr lang="en-US" sz="1150" dirty="0"/>
+          </a:p>
+          <a:p>
+            <a:pPr marL="0" indent="0" algn="ctr">
+              <a:lnSpc>
+                <a:spcPct val="135000"/>
+              </a:lnSpc>
+              <a:buNone/>
+            </a:pPr>
+            <a:r>
+              <a:rPr lang="en-US" sz="1150" dirty="0">
+                <a:solidFill>
+                  <a:srgbClr val="E3F2FD"/>
+                </a:solidFill>
+                <a:latin typeface="Calibri" pitchFamily="34" charset="0"/>
+                <a:ea typeface="Calibri" pitchFamily="34" charset="-122"/>
+                <a:cs typeface="Calibri" pitchFamily="34" charset="-120"/>
+              </a:rPr>
+              <a:t>гірше навчилась.</a:t>
+            </a:r>
+            <a:endParaRPr lang="en-US" sz="1150" dirty="0"/>
+          </a:p>
+        </p:txBody>
+      </p:sp>
+      <p:sp>
+        <p:nvSpPr>
+          <p:cNvPr id="20" name="Text 14">
+            <a:extLst>
+              <a:ext uri="{FF2B5EF4-FFF2-40B4-BE49-F238E27FC236}">
+                <a16:creationId xmlns:a16="http://schemas.microsoft.com/office/drawing/2014/main" id="{2CB14C4B-CCBD-400D-93BE-719543897F2B}"/>
+              </a:ext>
+            </a:extLst>
+          </p:cNvPr>
+          <p:cNvSpPr/>
+          <p:nvPr/>
+        </p:nvSpPr>
+        <p:spPr>
+          <a:xfrm>
+            <a:off x="5806440" y="2423160"/>
+            <a:ext cx="640080" cy="411480"/>
+          </a:xfrm>
+          <a:prstGeom prst="rect">
+            <a:avLst/>
+          </a:prstGeom>
+          <a:noFill/>
+          <a:ln/>
+        </p:spPr>
+        <p:txBody>
+          <a:bodyPr wrap="square" lIns="0" tIns="0" rIns="0" bIns="0" rtlCol="0" anchor="ctr"/>
+          <a:lstStyle/>
+          <a:p>
+            <a:pPr marL="0" indent="0" algn="ctr">
+              <a:buNone/>
+            </a:pPr>
+            <a:r>
+              <a:rPr lang="en-US" sz="2000" dirty="0">
+                <a:solidFill>
+                  <a:srgbClr val="B0BEC5"/>
+                </a:solidFill>
+              </a:rPr>
+              <a:t>→</a:t>
+            </a:r>
+            <a:endParaRPr lang="en-US" sz="2000" dirty="0"/>
+          </a:p>
+        </p:txBody>
+      </p:sp>
+      <p:sp>
+        <p:nvSpPr>
+          <p:cNvPr id="21" name="Shape 15">
+            <a:extLst>
+              <a:ext uri="{FF2B5EF4-FFF2-40B4-BE49-F238E27FC236}">
+                <a16:creationId xmlns:a16="http://schemas.microsoft.com/office/drawing/2014/main" id="{70590ADC-95A6-4FF6-AC36-330906B24693}"/>
+              </a:ext>
+            </a:extLst>
+          </p:cNvPr>
+          <p:cNvSpPr/>
+          <p:nvPr/>
+        </p:nvSpPr>
+        <p:spPr>
+          <a:xfrm>
+            <a:off x="6400800" y="1005840"/>
+            <a:ext cx="2468880" cy="3474720"/>
+          </a:xfrm>
+          <a:prstGeom prst="rect">
+            <a:avLst/>
+          </a:prstGeom>
+          <a:solidFill>
+            <a:srgbClr val="1B2A4A"/>
+          </a:solidFill>
+          <a:ln w="12700">
+            <a:solidFill>
+              <a:srgbClr val="43A047"/>
+            </a:solidFill>
+            <a:prstDash val="solid"/>
+          </a:ln>
+        </p:spPr>
+      </p:sp>
+      <p:sp>
+        <p:nvSpPr>
+          <p:cNvPr id="22" name="Shape 16">
+            <a:extLst>
+              <a:ext uri="{FF2B5EF4-FFF2-40B4-BE49-F238E27FC236}">
+                <a16:creationId xmlns:a16="http://schemas.microsoft.com/office/drawing/2014/main" id="{75DED3CC-E8D2-48A1-B814-539ACDBDFC31}"/>
+              </a:ext>
+            </a:extLst>
+          </p:cNvPr>
+          <p:cNvSpPr/>
+          <p:nvPr/>
+        </p:nvSpPr>
+        <p:spPr>
+          <a:xfrm>
+            <a:off x="7360920" y="960120"/>
+            <a:ext cx="548640" cy="548640"/>
+          </a:xfrm>
+          <a:prstGeom prst="ellipse">
+            <a:avLst/>
+          </a:prstGeom>
+          <a:solidFill>
+            <a:srgbClr val="43A047"/>
+          </a:solidFill>
+          <a:ln/>
+        </p:spPr>
+      </p:sp>
+      <p:sp>
+        <p:nvSpPr>
+          <p:cNvPr id="23" name="Text 17">
+            <a:extLst>
+              <a:ext uri="{FF2B5EF4-FFF2-40B4-BE49-F238E27FC236}">
+                <a16:creationId xmlns:a16="http://schemas.microsoft.com/office/drawing/2014/main" id="{AC1170D7-22D4-43AD-B04B-B31D13F5B895}"/>
+              </a:ext>
+            </a:extLst>
+          </p:cNvPr>
+          <p:cNvSpPr/>
+          <p:nvPr/>
+        </p:nvSpPr>
+        <p:spPr>
+          <a:xfrm>
+            <a:off x="7360920" y="960120"/>
+            <a:ext cx="548640" cy="548640"/>
+          </a:xfrm>
+          <a:prstGeom prst="rect">
+            <a:avLst/>
+          </a:prstGeom>
+          <a:noFill/>
+          <a:ln/>
+        </p:spPr>
+        <p:txBody>
+          <a:bodyPr wrap="square" lIns="0" tIns="0" rIns="0" bIns="0" rtlCol="0" anchor="ctr"/>
+          <a:lstStyle/>
+          <a:p>
+            <a:pPr marL="0" indent="0" algn="ctr">
+              <a:buNone/>
+            </a:pPr>
+            <a:r>
+              <a:rPr lang="en-US" sz="1600" b="1" dirty="0">
+                <a:solidFill>
+                  <a:srgbClr val="FFFFFF"/>
+                </a:solidFill>
+                <a:latin typeface="Calibri" pitchFamily="34" charset="0"/>
+                <a:ea typeface="Calibri" pitchFamily="34" charset="-122"/>
+                <a:cs typeface="Calibri" pitchFamily="34" charset="-120"/>
+              </a:rPr>
+              <a:t>3</a:t>
+            </a:r>
+            <a:endParaRPr lang="en-US" sz="1600" dirty="0"/>
+          </a:p>
+        </p:txBody>
+      </p:sp>
+      <p:sp>
+        <p:nvSpPr>
+          <p:cNvPr id="24" name="Text 18">
+            <a:extLst>
+              <a:ext uri="{FF2B5EF4-FFF2-40B4-BE49-F238E27FC236}">
+                <a16:creationId xmlns:a16="http://schemas.microsoft.com/office/drawing/2014/main" id="{2DD1E162-7C00-4BC3-9CF7-BE83D5F946C4}"/>
+              </a:ext>
+            </a:extLst>
+          </p:cNvPr>
+          <p:cNvSpPr/>
+          <p:nvPr/>
+        </p:nvSpPr>
+        <p:spPr>
+          <a:xfrm>
+            <a:off x="6492240" y="1508760"/>
+            <a:ext cx="2286000" cy="411480"/>
+          </a:xfrm>
+          <a:prstGeom prst="rect">
+            <a:avLst/>
+          </a:prstGeom>
+          <a:noFill/>
+          <a:ln/>
+        </p:spPr>
+        <p:txBody>
+          <a:bodyPr wrap="square" lIns="0" tIns="0" rIns="0" bIns="0" rtlCol="0" anchor="ctr"/>
+          <a:lstStyle/>
+          <a:p>
+            <a:pPr marL="0" indent="0" algn="ctr">
+              <a:buNone/>
+            </a:pPr>
+            <a:r>
+              <a:rPr lang="en-US" sz="1300" b="1" dirty="0">
+                <a:solidFill>
+                  <a:srgbClr val="43A047"/>
+                </a:solidFill>
+                <a:latin typeface="Calibri" pitchFamily="34" charset="0"/>
+                <a:ea typeface="Calibri" pitchFamily="34" charset="-122"/>
+                <a:cs typeface="Calibri" pitchFamily="34" charset="-120"/>
+              </a:rPr>
+              <a:t>Оновлення ваг</a:t>
+            </a:r>
+            <a:endParaRPr lang="en-US" sz="1300" dirty="0"/>
+          </a:p>
+        </p:txBody>
+      </p:sp>
+      <p:sp>
+        <p:nvSpPr>
+          <p:cNvPr id="25" name="Text 19">
+            <a:extLst>
+              <a:ext uri="{FF2B5EF4-FFF2-40B4-BE49-F238E27FC236}">
+                <a16:creationId xmlns:a16="http://schemas.microsoft.com/office/drawing/2014/main" id="{1DCDC2B4-9B07-4760-90CA-BB8C84EB39E4}"/>
+              </a:ext>
+            </a:extLst>
+          </p:cNvPr>
+          <p:cNvSpPr/>
+          <p:nvPr/>
+        </p:nvSpPr>
+        <p:spPr>
+          <a:xfrm>
+            <a:off x="6492240" y="1965960"/>
+            <a:ext cx="2286000" cy="2377440"/>
+          </a:xfrm>
+          <a:prstGeom prst="rect">
+            <a:avLst/>
+          </a:prstGeom>
+          <a:noFill/>
+          <a:ln/>
+        </p:spPr>
+        <p:txBody>
+          <a:bodyPr wrap="square" lIns="0" tIns="0" rIns="0" bIns="0" rtlCol="0" anchor="ctr"/>
+          <a:lstStyle/>
+          <a:p>
+            <a:pPr marL="0" indent="0" algn="ctr">
+              <a:lnSpc>
+                <a:spcPct val="135000"/>
+              </a:lnSpc>
+              <a:buNone/>
+            </a:pPr>
+            <a:r>
+              <a:rPr lang="en-US" sz="1150" dirty="0">
+                <a:solidFill>
+                  <a:srgbClr val="E3F2FD"/>
+                </a:solidFill>
+                <a:latin typeface="Calibri" pitchFamily="34" charset="0"/>
+                <a:ea typeface="Calibri" pitchFamily="34" charset="-122"/>
+                <a:cs typeface="Calibri" pitchFamily="34" charset="-120"/>
+              </a:rPr>
+              <a:t>Похибка поширюється</a:t>
+            </a:r>
+            <a:endParaRPr lang="en-US" sz="1150" dirty="0"/>
+          </a:p>
+          <a:p>
+            <a:pPr marL="0" indent="0" algn="ctr">
+              <a:lnSpc>
+                <a:spcPct val="135000"/>
+              </a:lnSpc>
+              <a:buNone/>
+            </a:pPr>
+            <a:r>
+              <a:rPr lang="en-US" sz="1150" dirty="0">
+                <a:solidFill>
+                  <a:srgbClr val="E3F2FD"/>
+                </a:solidFill>
+                <a:latin typeface="Calibri" pitchFamily="34" charset="0"/>
+                <a:ea typeface="Calibri" pitchFamily="34" charset="-122"/>
+                <a:cs typeface="Calibri" pitchFamily="34" charset="-120"/>
+              </a:rPr>
+              <a:t>назад через мережу.</a:t>
+            </a:r>
+            <a:endParaRPr lang="en-US" sz="1150" dirty="0"/>
+          </a:p>
+          <a:p>
+            <a:pPr marL="0" indent="0" algn="ctr">
+              <a:lnSpc>
+                <a:spcPct val="135000"/>
+              </a:lnSpc>
+              <a:buNone/>
+            </a:pPr>
+            <a:r>
+              <a:rPr lang="en-US" sz="1150" dirty="0">
+                <a:solidFill>
+                  <a:srgbClr val="E3F2FD"/>
+                </a:solidFill>
+                <a:latin typeface="Calibri" pitchFamily="34" charset="0"/>
+                <a:ea typeface="Calibri" pitchFamily="34" charset="-122"/>
+                <a:cs typeface="Calibri" pitchFamily="34" charset="-120"/>
+              </a:rPr>
+              <a:t>Кожна вага отримує</a:t>
+            </a:r>
+            <a:endParaRPr lang="en-US" sz="1150" dirty="0"/>
+          </a:p>
+          <a:p>
+            <a:pPr marL="0" indent="0" algn="ctr">
+              <a:lnSpc>
+                <a:spcPct val="135000"/>
+              </a:lnSpc>
+              <a:buNone/>
+            </a:pPr>
+            <a:r>
+              <a:rPr lang="en-US" sz="1150" dirty="0">
+                <a:solidFill>
+                  <a:srgbClr val="E3F2FD"/>
+                </a:solidFill>
+                <a:latin typeface="Calibri" pitchFamily="34" charset="0"/>
+                <a:ea typeface="Calibri" pitchFamily="34" charset="-122"/>
+                <a:cs typeface="Calibri" pitchFamily="34" charset="-120"/>
+              </a:rPr>
+              <a:t>свою «частку вини»</a:t>
+            </a:r>
+            <a:endParaRPr lang="en-US" sz="1150" dirty="0"/>
+          </a:p>
+          <a:p>
+            <a:pPr marL="0" indent="0" algn="ctr">
+              <a:lnSpc>
+                <a:spcPct val="135000"/>
+              </a:lnSpc>
+              <a:buNone/>
+            </a:pPr>
+            <a:r>
+              <a:rPr lang="en-US" sz="1150" dirty="0">
+                <a:solidFill>
+                  <a:srgbClr val="E3F2FD"/>
+                </a:solidFill>
+                <a:latin typeface="Calibri" pitchFamily="34" charset="0"/>
+                <a:ea typeface="Calibri" pitchFamily="34" charset="-122"/>
+                <a:cs typeface="Calibri" pitchFamily="34" charset="-120"/>
+              </a:rPr>
+              <a:t>і зміщується у бік</a:t>
+            </a:r>
+            <a:endParaRPr lang="en-US" sz="1150" dirty="0"/>
+          </a:p>
+          <a:p>
+            <a:pPr marL="0" indent="0" algn="ctr">
+              <a:lnSpc>
+                <a:spcPct val="135000"/>
+              </a:lnSpc>
+              <a:buNone/>
+            </a:pPr>
+            <a:r>
+              <a:rPr lang="en-US" sz="1150" dirty="0">
+                <a:solidFill>
+                  <a:srgbClr val="E3F2FD"/>
+                </a:solidFill>
+                <a:latin typeface="Calibri" pitchFamily="34" charset="0"/>
+                <a:ea typeface="Calibri" pitchFamily="34" charset="-122"/>
+                <a:cs typeface="Calibri" pitchFamily="34" charset="-120"/>
+              </a:rPr>
+              <a:t>меншої помилки.</a:t>
+            </a:r>
+            <a:endParaRPr lang="en-US" sz="1150" dirty="0"/>
+          </a:p>
+        </p:txBody>
+      </p:sp>
+      <p:sp>
+        <p:nvSpPr>
+          <p:cNvPr id="26" name="Text 20">
+            <a:extLst>
+              <a:ext uri="{FF2B5EF4-FFF2-40B4-BE49-F238E27FC236}">
+                <a16:creationId xmlns:a16="http://schemas.microsoft.com/office/drawing/2014/main" id="{7D842B9B-1101-466E-99C3-335B33B0FCAC}"/>
+              </a:ext>
+            </a:extLst>
+          </p:cNvPr>
+          <p:cNvSpPr/>
+          <p:nvPr/>
+        </p:nvSpPr>
+        <p:spPr>
+          <a:xfrm>
+            <a:off x="274320" y="4663440"/>
+            <a:ext cx="8595360" cy="320040"/>
+          </a:xfrm>
+          <a:prstGeom prst="rect">
+            <a:avLst/>
+          </a:prstGeom>
+          <a:noFill/>
+          <a:ln/>
+        </p:spPr>
+        <p:txBody>
+          <a:bodyPr wrap="square" lIns="0" tIns="0" rIns="0" bIns="0" rtlCol="0" anchor="ctr"/>
+          <a:lstStyle/>
+          <a:p>
+            <a:pPr marL="0" indent="0" algn="ctr">
+              <a:buNone/>
+            </a:pPr>
+            <a:r>
+              <a:rPr lang="en-US" sz="1050" i="1" dirty="0">
+                <a:solidFill>
+                  <a:srgbClr val="B0BEC5"/>
+                </a:solidFill>
+                <a:latin typeface="Calibri" pitchFamily="34" charset="0"/>
+                <a:ea typeface="Calibri" pitchFamily="34" charset="-122"/>
+                <a:cs typeface="Calibri" pitchFamily="34" charset="-120"/>
+              </a:rPr>
+              <a:t>Цикл повторюється сотні або тисячі разів — поки функція втрат не досягне мінімуму</a:t>
+            </a:r>
+            <a:endParaRPr lang="en-US" sz="1050" dirty="0"/>
+          </a:p>
+        </p:txBody>
+      </p:sp>
+    </p:spTree>
+    <p:extLst>
+      <p:ext uri="{BB962C8B-B14F-4D97-AF65-F5344CB8AC3E}">
+        <p14:creationId xmlns:p14="http://schemas.microsoft.com/office/powerpoint/2010/main" val="1592647261"/>
+      </p:ext>
+    </p:extLst>
+  </p:cSld>
+  <p:clrMapOvr>
+    <a:masterClrMapping/>
+  </p:clrMapOvr>
+</p:sld>
+</file>
+
+<file path=ppt/slides/slide6.xml><?xml version="1.0" encoding="utf-8"?>
+<p:sld xmlns:a="http://schemas.openxmlformats.org/drawingml/2006/main" xmlns:r="http://schemas.openxmlformats.org/officeDocument/2006/relationships" xmlns:p="http://schemas.openxmlformats.org/presentationml/2006/main">
   <p:cSld name="Slide 5">
     <p:bg>
       <p:bgPr>
@@ -7157,7 +8461,7 @@
 </p:sld>
 </file>
 
-<file path=ppt/slides/slide6.xml><?xml version="1.0" encoding="utf-8"?>
+<file path=ppt/slides/slide7.xml><?xml version="1.0" encoding="utf-8"?>
 <p:sld xmlns:a="http://schemas.openxmlformats.org/drawingml/2006/main" xmlns:r="http://schemas.openxmlformats.org/officeDocument/2006/relationships" xmlns:p="http://schemas.openxmlformats.org/presentationml/2006/main">
   <p:cSld name="Slide 6">
     <p:bg>
@@ -9090,7 +10394,7 @@
 </p:sld>
 </file>
 
-<file path=ppt/slides/slide7.xml><?xml version="1.0" encoding="utf-8"?>
+<file path=ppt/slides/slide8.xml><?xml version="1.0" encoding="utf-8"?>
 <p:sld xmlns:a="http://schemas.openxmlformats.org/drawingml/2006/main" xmlns:r="http://schemas.openxmlformats.org/officeDocument/2006/relationships" xmlns:p="http://schemas.openxmlformats.org/presentationml/2006/main">
   <p:cSld name="Slide 7">
     <p:bg>
@@ -9579,7 +10883,7 @@
 </p:sld>
 </file>
 
-<file path=ppt/slides/slide8.xml><?xml version="1.0" encoding="utf-8"?>
+<file path=ppt/slides/slide9.xml><?xml version="1.0" encoding="utf-8"?>
 <p:sld xmlns:a="http://schemas.openxmlformats.org/drawingml/2006/main" xmlns:r="http://schemas.openxmlformats.org/officeDocument/2006/relationships" xmlns:p="http://schemas.openxmlformats.org/presentationml/2006/main">
   <p:cSld name="Slide 8">
     <p:bg>
@@ -10116,122 +11420,6 @@
           </a:p>
         </p:txBody>
       </p:sp>
-    </p:spTree>
-  </p:cSld>
-  <p:clrMapOvr>
-    <a:masterClrMapping/>
-  </p:clrMapOvr>
-</p:sld>
-</file>
-
-<file path=ppt/slides/slide9.xml><?xml version="1.0" encoding="utf-8"?>
-<p:sld xmlns:a="http://schemas.openxmlformats.org/drawingml/2006/main" xmlns:r="http://schemas.openxmlformats.org/officeDocument/2006/relationships" xmlns:p="http://schemas.openxmlformats.org/presentationml/2006/main">
-  <p:cSld name="Slide 9">
-    <p:bg>
-      <p:bgPr>
-        <a:solidFill>
-          <a:srgbClr val="0D1B2A"/>
-        </a:solidFill>
-        <a:effectLst/>
-      </p:bgPr>
-    </p:bg>
-    <p:spTree>
-      <p:nvGrpSpPr>
-        <p:cNvPr id="1" name=""/>
-        <p:cNvGrpSpPr/>
-        <p:nvPr/>
-      </p:nvGrpSpPr>
-      <p:grpSpPr>
-        <a:xfrm>
-          <a:off x="0" y="0"/>
-          <a:ext cx="0" cy="0"/>
-          <a:chOff x="0" y="0"/>
-          <a:chExt cx="0" cy="0"/>
-        </a:xfrm>
-      </p:grpSpPr>
-      <p:sp>
-        <p:nvSpPr>
-          <p:cNvPr id="2" name="Shape 0"/>
-          <p:cNvSpPr/>
-          <p:nvPr/>
-        </p:nvSpPr>
-        <p:spPr>
-          <a:xfrm>
-            <a:off x="0" y="0"/>
-            <a:ext cx="9144000" cy="914400"/>
-          </a:xfrm>
-          <a:prstGeom prst="rect">
-            <a:avLst/>
-          </a:prstGeom>
-          <a:solidFill>
-            <a:srgbClr val="1B2A4A"/>
-          </a:solidFill>
-          <a:ln/>
-        </p:spPr>
-      </p:sp>
-      <p:sp>
-        <p:nvSpPr>
-          <p:cNvPr id="3" name="Text 1"/>
-          <p:cNvSpPr/>
-          <p:nvPr/>
-        </p:nvSpPr>
-        <p:spPr>
-          <a:xfrm>
-            <a:off x="365760" y="137160"/>
-            <a:ext cx="8229600" cy="640080"/>
-          </a:xfrm>
-          <a:prstGeom prst="rect">
-            <a:avLst/>
-          </a:prstGeom>
-          <a:noFill/>
-          <a:ln/>
-        </p:spPr>
-        <p:txBody>
-          <a:bodyPr wrap="square" lIns="0" tIns="0" rIns="0" bIns="0" rtlCol="0" anchor="ctr"/>
-          <a:lstStyle/>
-          <a:p>
-            <a:pPr marL="0" indent="0">
-              <a:buNone/>
-            </a:pPr>
-            <a:r>
-              <a:rPr lang="en-US" sz="2200" b="1" dirty="0">
-                <a:solidFill>
-                  <a:srgbClr val="FFFFFF"/>
-                </a:solidFill>
-                <a:latin typeface="Calibri" pitchFamily="34" charset="0"/>
-                <a:ea typeface="Calibri" pitchFamily="34" charset="-122"/>
-                <a:cs typeface="Calibri" pitchFamily="34" charset="-120"/>
-              </a:rPr>
-              <a:t>ГРАФІКИ ЗБІЖНОСТІ МЕТОДІВ</a:t>
-            </a:r>
-            <a:endParaRPr lang="en-US" sz="2200" dirty="0"/>
-          </a:p>
-        </p:txBody>
-      </p:sp>
-      <p:pic>
-        <p:nvPicPr>
-          <p:cNvPr id="4" name="Image 0" descr="preencoded.png"/>
-          <p:cNvPicPr>
-            <a:picLocks noChangeAspect="1"/>
-          </p:cNvPicPr>
-          <p:nvPr/>
-        </p:nvPicPr>
-        <p:blipFill>
-          <a:blip r:embed="rId3"/>
-          <a:stretch>
-            <a:fillRect/>
-          </a:stretch>
-        </p:blipFill>
-        <p:spPr>
-          <a:xfrm>
-            <a:off x="274320" y="960120"/>
-            <a:ext cx="8595360" cy="3977640"/>
-          </a:xfrm>
-          <a:prstGeom prst="rect">
-            <a:avLst/>
-          </a:prstGeom>
-        </p:spPr>
-      </p:pic>
     </p:spTree>
   </p:cSld>
   <p:clrMapOvr>
